--- a/ppt/IoT30-AI.pptx
+++ b/ppt/IoT30-AI.pptx
@@ -5,10 +5,10 @@
     <p:sldMasterId id="2147483653" r:id="rId1"/>
   </p:sldMasterIdLst>
   <p:notesMasterIdLst>
-    <p:notesMasterId r:id="rId7"/>
+    <p:notesMasterId r:id="rId9"/>
   </p:notesMasterIdLst>
   <p:handoutMasterIdLst>
-    <p:handoutMasterId r:id="rId8"/>
+    <p:handoutMasterId r:id="rId10"/>
   </p:handoutMasterIdLst>
   <p:sldIdLst>
     <p:sldId id="264" r:id="rId2"/>
@@ -16,6 +16,8 @@
     <p:sldId id="265" r:id="rId4"/>
     <p:sldId id="267" r:id="rId5"/>
     <p:sldId id="268" r:id="rId6"/>
+    <p:sldId id="269" r:id="rId7"/>
+    <p:sldId id="291" r:id="rId8"/>
   </p:sldIdLst>
   <p:sldSz cx="9144000" cy="6858000" type="screen4x3"/>
   <p:notesSz cx="6648450" cy="9782175"/>
@@ -3860,12 +3862,6 @@
             </a:r>
           </a:p>
           <a:p>
-            <a:r>
-              <a:rPr lang="fr-FR" dirty="0"/>
-              <a:t>A noter que cette librairie sait faire des FFT</a:t>
-            </a:r>
-          </a:p>
-          <a:p>
             <a:endParaRPr lang="fr-FR" dirty="0"/>
           </a:p>
         </p:txBody>
@@ -4249,13 +4245,8 @@
           <a:p>
             <a:r>
               <a:rPr lang="fr-FR" dirty="0"/>
-              <a:t>De nombreux modules </a:t>
-            </a:r>
-            <a:r>
-              <a:rPr lang="fr-FR" dirty="0" err="1"/>
-              <a:t>existents</a:t>
-            </a:r>
-            <a:endParaRPr lang="fr-FR" dirty="0"/>
+              <a:t>De nombreux modules existent</a:t>
+            </a:r>
           </a:p>
         </p:txBody>
       </p:sp>
@@ -4303,6 +4294,202 @@
     <p:extLst>
       <p:ext uri="{BB962C8B-B14F-4D97-AF65-F5344CB8AC3E}">
         <p14:creationId xmlns:p14="http://schemas.microsoft.com/office/powerpoint/2010/main" val="2202934067"/>
+      </p:ext>
+    </p:extLst>
+  </p:cSld>
+  <p:clrMapOvr>
+    <a:masterClrMapping/>
+  </p:clrMapOvr>
+</p:sld>
+</file>
+
+<file path=ppt/slides/slide6.xml><?xml version="1.0" encoding="utf-8"?>
+<p:sld xmlns:a="http://schemas.openxmlformats.org/drawingml/2006/main" xmlns:r="http://schemas.openxmlformats.org/officeDocument/2006/relationships" xmlns:p="http://schemas.openxmlformats.org/presentationml/2006/main">
+  <p:cSld>
+    <p:spTree>
+      <p:nvGrpSpPr>
+        <p:cNvPr id="1" name=""/>
+        <p:cNvGrpSpPr/>
+        <p:nvPr/>
+      </p:nvGrpSpPr>
+      <p:grpSpPr>
+        <a:xfrm>
+          <a:off x="0" y="0"/>
+          <a:ext cx="0" cy="0"/>
+          <a:chOff x="0" y="0"/>
+          <a:chExt cx="0" cy="0"/>
+        </a:xfrm>
+      </p:grpSpPr>
+      <p:sp>
+        <p:nvSpPr>
+          <p:cNvPr id="2" name="Titre 1">
+            <a:extLst>
+              <a:ext uri="{FF2B5EF4-FFF2-40B4-BE49-F238E27FC236}">
+                <a16:creationId xmlns:a16="http://schemas.microsoft.com/office/drawing/2014/main" id="{AEAC7B9C-632C-F108-F9E4-E8BC7FA06394}"/>
+              </a:ext>
+            </a:extLst>
+          </p:cNvPr>
+          <p:cNvSpPr>
+            <a:spLocks noGrp="1"/>
+          </p:cNvSpPr>
+          <p:nvPr>
+            <p:ph type="title"/>
+          </p:nvPr>
+        </p:nvSpPr>
+        <p:spPr/>
+        <p:txBody>
+          <a:bodyPr/>
+          <a:lstStyle/>
+          <a:p>
+            <a:r>
+              <a:rPr lang="fr-FR" dirty="0"/>
+              <a:t>PCB</a:t>
+            </a:r>
+          </a:p>
+        </p:txBody>
+      </p:sp>
+      <p:sp>
+        <p:nvSpPr>
+          <p:cNvPr id="3" name="Espace réservé du contenu 2">
+            <a:extLst>
+              <a:ext uri="{FF2B5EF4-FFF2-40B4-BE49-F238E27FC236}">
+                <a16:creationId xmlns:a16="http://schemas.microsoft.com/office/drawing/2014/main" id="{6F85BCBB-2C77-73B1-2F81-3FA00B3BA390}"/>
+              </a:ext>
+            </a:extLst>
+          </p:cNvPr>
+          <p:cNvSpPr>
+            <a:spLocks noGrp="1"/>
+          </p:cNvSpPr>
+          <p:nvPr>
+            <p:ph idx="1"/>
+          </p:nvPr>
+        </p:nvSpPr>
+        <p:spPr/>
+        <p:txBody>
+          <a:bodyPr/>
+          <a:lstStyle/>
+          <a:p>
+            <a:endParaRPr lang="fr-FR"/>
+          </a:p>
+        </p:txBody>
+      </p:sp>
+    </p:spTree>
+    <p:extLst>
+      <p:ext uri="{BB962C8B-B14F-4D97-AF65-F5344CB8AC3E}">
+        <p14:creationId xmlns:p14="http://schemas.microsoft.com/office/powerpoint/2010/main" val="936071946"/>
+      </p:ext>
+    </p:extLst>
+  </p:cSld>
+  <p:clrMapOvr>
+    <a:masterClrMapping/>
+  </p:clrMapOvr>
+</p:sld>
+</file>
+
+<file path=ppt/slides/slide7.xml><?xml version="1.0" encoding="utf-8"?>
+<p:sld xmlns:a="http://schemas.openxmlformats.org/drawingml/2006/main" xmlns:r="http://schemas.openxmlformats.org/officeDocument/2006/relationships" xmlns:p="http://schemas.openxmlformats.org/presentationml/2006/main">
+  <p:cSld>
+    <p:spTree>
+      <p:nvGrpSpPr>
+        <p:cNvPr id="1" name=""/>
+        <p:cNvGrpSpPr/>
+        <p:nvPr/>
+      </p:nvGrpSpPr>
+      <p:grpSpPr>
+        <a:xfrm>
+          <a:off x="0" y="0"/>
+          <a:ext cx="0" cy="0"/>
+          <a:chOff x="0" y="0"/>
+          <a:chExt cx="0" cy="0"/>
+        </a:xfrm>
+      </p:grpSpPr>
+      <p:sp>
+        <p:nvSpPr>
+          <p:cNvPr id="2" name="Titre 1">
+            <a:extLst>
+              <a:ext uri="{FF2B5EF4-FFF2-40B4-BE49-F238E27FC236}">
+                <a16:creationId xmlns:a16="http://schemas.microsoft.com/office/drawing/2014/main" id="{4C9D3DA7-6B8F-2BA7-77E9-60812EB58941}"/>
+              </a:ext>
+            </a:extLst>
+          </p:cNvPr>
+          <p:cNvSpPr>
+            <a:spLocks noGrp="1"/>
+          </p:cNvSpPr>
+          <p:nvPr>
+            <p:ph type="title"/>
+          </p:nvPr>
+        </p:nvSpPr>
+        <p:spPr/>
+        <p:txBody>
+          <a:bodyPr/>
+          <a:lstStyle/>
+          <a:p>
+            <a:r>
+              <a:rPr lang="fr-FR" dirty="0"/>
+              <a:t>PCB AI</a:t>
+            </a:r>
+          </a:p>
+        </p:txBody>
+      </p:sp>
+      <p:sp>
+        <p:nvSpPr>
+          <p:cNvPr id="3" name="Espace réservé du contenu 2">
+            <a:extLst>
+              <a:ext uri="{FF2B5EF4-FFF2-40B4-BE49-F238E27FC236}">
+                <a16:creationId xmlns:a16="http://schemas.microsoft.com/office/drawing/2014/main" id="{25BD11FE-E82C-40E8-2953-5B34A147863B}"/>
+              </a:ext>
+            </a:extLst>
+          </p:cNvPr>
+          <p:cNvSpPr>
+            <a:spLocks noGrp="1"/>
+          </p:cNvSpPr>
+          <p:nvPr>
+            <p:ph idx="1"/>
+          </p:nvPr>
+        </p:nvSpPr>
+        <p:spPr/>
+        <p:txBody>
+          <a:bodyPr/>
+          <a:lstStyle/>
+          <a:p>
+            <a:endParaRPr lang="fr-FR"/>
+          </a:p>
+        </p:txBody>
+      </p:sp>
+      <p:pic>
+        <p:nvPicPr>
+          <p:cNvPr id="5" name="Image 4">
+            <a:extLst>
+              <a:ext uri="{FF2B5EF4-FFF2-40B4-BE49-F238E27FC236}">
+                <a16:creationId xmlns:a16="http://schemas.microsoft.com/office/drawing/2014/main" id="{95510ED6-0652-355B-DAC4-417346CA0970}"/>
+              </a:ext>
+            </a:extLst>
+          </p:cNvPr>
+          <p:cNvPicPr>
+            <a:picLocks noChangeAspect="1"/>
+          </p:cNvPicPr>
+          <p:nvPr/>
+        </p:nvPicPr>
+        <p:blipFill>
+          <a:blip r:embed="rId2"/>
+          <a:stretch>
+            <a:fillRect/>
+          </a:stretch>
+        </p:blipFill>
+        <p:spPr>
+          <a:xfrm>
+            <a:off x="0" y="1870363"/>
+            <a:ext cx="9144000" cy="3117273"/>
+          </a:xfrm>
+          <a:prstGeom prst="rect">
+            <a:avLst/>
+          </a:prstGeom>
+        </p:spPr>
+      </p:pic>
+    </p:spTree>
+    <p:extLst>
+      <p:ext uri="{BB962C8B-B14F-4D97-AF65-F5344CB8AC3E}">
+        <p14:creationId xmlns:p14="http://schemas.microsoft.com/office/powerpoint/2010/main" val="346060011"/>
       </p:ext>
     </p:extLst>
   </p:cSld>

--- a/ppt/IoT30-AI.pptx
+++ b/ppt/IoT30-AI.pptx
@@ -5,10 +5,10 @@
     <p:sldMasterId id="2147483653" r:id="rId1"/>
   </p:sldMasterIdLst>
   <p:notesMasterIdLst>
-    <p:notesMasterId r:id="rId9"/>
+    <p:notesMasterId r:id="rId8"/>
   </p:notesMasterIdLst>
   <p:handoutMasterIdLst>
-    <p:handoutMasterId r:id="rId10"/>
+    <p:handoutMasterId r:id="rId9"/>
   </p:handoutMasterIdLst>
   <p:sldIdLst>
     <p:sldId id="264" r:id="rId2"/>
@@ -16,8 +16,7 @@
     <p:sldId id="265" r:id="rId4"/>
     <p:sldId id="267" r:id="rId5"/>
     <p:sldId id="268" r:id="rId6"/>
-    <p:sldId id="269" r:id="rId7"/>
-    <p:sldId id="291" r:id="rId8"/>
+    <p:sldId id="291" r:id="rId7"/>
   </p:sldIdLst>
   <p:sldSz cx="9144000" cy="6858000" type="screen4x3"/>
   <p:notesSz cx="6648450" cy="9782175"/>
@@ -4304,89 +4303,6 @@
 </file>
 
 <file path=ppt/slides/slide6.xml><?xml version="1.0" encoding="utf-8"?>
-<p:sld xmlns:a="http://schemas.openxmlformats.org/drawingml/2006/main" xmlns:r="http://schemas.openxmlformats.org/officeDocument/2006/relationships" xmlns:p="http://schemas.openxmlformats.org/presentationml/2006/main">
-  <p:cSld>
-    <p:spTree>
-      <p:nvGrpSpPr>
-        <p:cNvPr id="1" name=""/>
-        <p:cNvGrpSpPr/>
-        <p:nvPr/>
-      </p:nvGrpSpPr>
-      <p:grpSpPr>
-        <a:xfrm>
-          <a:off x="0" y="0"/>
-          <a:ext cx="0" cy="0"/>
-          <a:chOff x="0" y="0"/>
-          <a:chExt cx="0" cy="0"/>
-        </a:xfrm>
-      </p:grpSpPr>
-      <p:sp>
-        <p:nvSpPr>
-          <p:cNvPr id="2" name="Titre 1">
-            <a:extLst>
-              <a:ext uri="{FF2B5EF4-FFF2-40B4-BE49-F238E27FC236}">
-                <a16:creationId xmlns:a16="http://schemas.microsoft.com/office/drawing/2014/main" id="{AEAC7B9C-632C-F108-F9E4-E8BC7FA06394}"/>
-              </a:ext>
-            </a:extLst>
-          </p:cNvPr>
-          <p:cNvSpPr>
-            <a:spLocks noGrp="1"/>
-          </p:cNvSpPr>
-          <p:nvPr>
-            <p:ph type="title"/>
-          </p:nvPr>
-        </p:nvSpPr>
-        <p:spPr/>
-        <p:txBody>
-          <a:bodyPr/>
-          <a:lstStyle/>
-          <a:p>
-            <a:r>
-              <a:rPr lang="fr-FR" dirty="0"/>
-              <a:t>PCB</a:t>
-            </a:r>
-          </a:p>
-        </p:txBody>
-      </p:sp>
-      <p:sp>
-        <p:nvSpPr>
-          <p:cNvPr id="3" name="Espace réservé du contenu 2">
-            <a:extLst>
-              <a:ext uri="{FF2B5EF4-FFF2-40B4-BE49-F238E27FC236}">
-                <a16:creationId xmlns:a16="http://schemas.microsoft.com/office/drawing/2014/main" id="{6F85BCBB-2C77-73B1-2F81-3FA00B3BA390}"/>
-              </a:ext>
-            </a:extLst>
-          </p:cNvPr>
-          <p:cNvSpPr>
-            <a:spLocks noGrp="1"/>
-          </p:cNvSpPr>
-          <p:nvPr>
-            <p:ph idx="1"/>
-          </p:nvPr>
-        </p:nvSpPr>
-        <p:spPr/>
-        <p:txBody>
-          <a:bodyPr/>
-          <a:lstStyle/>
-          <a:p>
-            <a:endParaRPr lang="fr-FR"/>
-          </a:p>
-        </p:txBody>
-      </p:sp>
-    </p:spTree>
-    <p:extLst>
-      <p:ext uri="{BB962C8B-B14F-4D97-AF65-F5344CB8AC3E}">
-        <p14:creationId xmlns:p14="http://schemas.microsoft.com/office/powerpoint/2010/main" val="936071946"/>
-      </p:ext>
-    </p:extLst>
-  </p:cSld>
-  <p:clrMapOvr>
-    <a:masterClrMapping/>
-  </p:clrMapOvr>
-</p:sld>
-</file>
-
-<file path=ppt/slides/slide7.xml><?xml version="1.0" encoding="utf-8"?>
 <p:sld xmlns:a="http://schemas.openxmlformats.org/drawingml/2006/main" xmlns:r="http://schemas.openxmlformats.org/officeDocument/2006/relationships" xmlns:p="http://schemas.openxmlformats.org/presentationml/2006/main">
   <p:cSld>
     <p:spTree>
